--- a/ERGO-Mengengeruest-2Slides.pptx
+++ b/ERGO-Mengengeruest-2Slides.pptx
@@ -177,7 +177,7 @@
               <c:strCache>
                 <c:ptCount val="3"/>
                 <c:pt idx="0">
-                  <c:v>Neue BUe (4.000)</c:v>
+                  <c:v>BUe-Anfrage-Mails (4.000)</c:v>
                 </c:pt>
                 <c:pt idx="1">
                   <c:v>Keine BUe (705)</c:v>
@@ -463,7 +463,7 @@
               <c:strCache>
                 <c:ptCount val="1"/>
                 <c:pt idx="0">
-                  <c:v>Neue BUe</c:v>
+                  <c:v>BUe-Mails</c:v>
                 </c:pt>
               </c:strCache>
             </c:strRef>
@@ -474,7 +474,7 @@
             </a:solidFill>
           </c:spPr>
           <c:dPt>
-            <c:idx val="0"/>
+            <c:idx val="9"/>
             <c:spPr>
               <a:solidFill>
                 <a:srgbClr val="8E0A20"/>
@@ -482,7 +482,7 @@
             </c:spPr>
           </c:dPt>
           <c:dPt>
-            <c:idx val="1"/>
+            <c:idx val="8"/>
             <c:spPr>
               <a:solidFill>
                 <a:srgbClr val="8E0A20"/>
@@ -490,7 +490,7 @@
             </c:spPr>
           </c:dPt>
           <c:dPt>
-            <c:idx val="2"/>
+            <c:idx val="7"/>
             <c:spPr>
               <a:solidFill>
                 <a:srgbClr val="8E0A20"/>
@@ -503,34 +503,34 @@
               <c:strCache>
                 <c:ptCount val="10"/>
                 <c:pt idx="0">
-                  <c:v>JDC / Jung, DMS &amp; Cie.</c:v>
+                  <c:v>Concordia</c:v>
                 </c:pt>
                 <c:pt idx="1">
+                  <c:v>Securess</c:v>
+                </c:pt>
+                <c:pt idx="2">
+                  <c:v>1:1 Assekuranz</c:v>
+                </c:pt>
+                <c:pt idx="3">
+                  <c:v>vfm Service</c:v>
+                </c:pt>
+                <c:pt idx="4">
+                  <c:v>[pma:] Finanz- u. VM</c:v>
+                </c:pt>
+                <c:pt idx="5">
+                  <c:v>DEMA</c:v>
+                </c:pt>
+                <c:pt idx="6">
+                  <c:v>(ohne Pool)</c:v>
+                </c:pt>
+                <c:pt idx="7">
+                  <c:v>blau direkt</c:v>
+                </c:pt>
+                <c:pt idx="8">
                   <c:v>Fonds Finanz</c:v>
                 </c:pt>
-                <c:pt idx="2">
-                  <c:v>blau direkt</c:v>
-                </c:pt>
-                <c:pt idx="3">
-                  <c:v>(ohne Pool)</c:v>
-                </c:pt>
-                <c:pt idx="4">
-                  <c:v>DEMA</c:v>
-                </c:pt>
-                <c:pt idx="5">
-                  <c:v>[pma:] Finanz- u. VM</c:v>
-                </c:pt>
-                <c:pt idx="6">
-                  <c:v>vfm Service</c:v>
-                </c:pt>
-                <c:pt idx="7">
-                  <c:v>1:1 Assekuranz</c:v>
-                </c:pt>
-                <c:pt idx="8">
-                  <c:v>Securess</c:v>
-                </c:pt>
                 <c:pt idx="9">
-                  <c:v>Concordia</c:v>
+                  <c:v>JDC / Jung, DMS &amp; Cie.</c:v>
                 </c:pt>
               </c:strCache>
             </c:strRef>
@@ -542,34 +542,34 @@
                 <c:formatCode>General</c:formatCode>
                 <c:ptCount val="10"/>
                 <c:pt idx="0">
-                  <c:v>1538</c:v>
+                  <c:v>57</c:v>
                 </c:pt>
                 <c:pt idx="1">
+                  <c:v>70</c:v>
+                </c:pt>
+                <c:pt idx="2">
+                  <c:v>75</c:v>
+                </c:pt>
+                <c:pt idx="3">
+                  <c:v>75</c:v>
+                </c:pt>
+                <c:pt idx="4">
+                  <c:v>77</c:v>
+                </c:pt>
+                <c:pt idx="5">
+                  <c:v>114</c:v>
+                </c:pt>
+                <c:pt idx="6">
+                  <c:v>204</c:v>
+                </c:pt>
+                <c:pt idx="7">
+                  <c:v>255</c:v>
+                </c:pt>
+                <c:pt idx="8">
                   <c:v>612</c:v>
                 </c:pt>
-                <c:pt idx="2">
-                  <c:v>255</c:v>
-                </c:pt>
-                <c:pt idx="3">
-                  <c:v>204</c:v>
-                </c:pt>
-                <c:pt idx="4">
-                  <c:v>114</c:v>
-                </c:pt>
-                <c:pt idx="5">
-                  <c:v>77</c:v>
-                </c:pt>
-                <c:pt idx="6">
-                  <c:v>75</c:v>
-                </c:pt>
-                <c:pt idx="7">
-                  <c:v>75</c:v>
-                </c:pt>
-                <c:pt idx="8">
-                  <c:v>70</c:v>
-                </c:pt>
                 <c:pt idx="9">
-                  <c:v>57</c:v>
+                  <c:v>1538</c:v>
                 </c:pt>
               </c:numCache>
             </c:numRef>
@@ -598,7 +598,7 @@
           <c:showBubbleSize val="0"/>
           <c:showLeaderLines val="1"/>
         </c:dLbls>
-        <c:gapWidth val="50"/>
+        <c:gapWidth val="40"/>
         <c:axId val="-2068027336"/>
         <c:axId val="-2113994440"/>
       </c:barChart>
@@ -635,7 +635,7 @@
       <c:valAx>
         <c:axId val="-2113994440"/>
         <c:scaling>
-          <c:max val="1700.0"/>
+          <c:max val="1750.0"/>
         </c:scaling>
         <c:delete val="0"/>
         <c:axPos val="b"/>
@@ -3767,7 +3767,7 @@
                 </a:solidFill>
                 <a:latin typeface="Calibri"/>
               </a:rPr>
-              <a:t>5034 eingehende Mails | 94% in 1 Sammel-Postfach | Nur 79% sind echte neue Vorgaenge</a:t>
+              <a:t>5.034 Mails Eingang  -&gt;  4.000 davon sind BUe-Anfrage-Mails  -&gt;  Konsolidierung zu Vorgaengen siehe Slide 2</a:t>
             </a:r>
           </a:p>
         </p:txBody>
@@ -4240,7 +4240,7 @@
                 </a:solidFill>
                 <a:latin typeface="Calibri"/>
               </a:rPr>
-              <a:t>DAVON ECHTE NEUE BUe</a:t>
+              <a:t>DAVON BUe-ANFRAGE-MAILS</a:t>
             </a:r>
           </a:p>
         </p:txBody>
@@ -4310,7 +4310,7 @@
                 </a:solidFill>
                 <a:latin typeface="Calibri"/>
               </a:rPr>
-              <a:t>= 79,5 % - der Rest ist Triage-Aufwand</a:t>
+              <a:t>= 79,5 % der Mails  -  Rest = Triage-Aufwand</a:t>
             </a:r>
           </a:p>
         </p:txBody>
@@ -4479,7 +4479,7 @@
                 </a:solidFill>
                 <a:latin typeface="Calibri"/>
               </a:rPr>
-              <a:t>echte Neue BUe</a:t>
+              <a:t>BUe-Mails</a:t>
             </a:r>
           </a:p>
         </p:txBody>
@@ -4560,7 +4560,7 @@
                 </a:solidFill>
                 <a:latin typeface="Calibri"/>
               </a:rPr>
-              <a:t>2. SPARTEN-SPLIT der 4.000 Neue-BUe</a:t>
+              <a:t>2. SPARTEN-SPLIT der 4.000 BUe-Mails</a:t>
             </a:r>
           </a:p>
         </p:txBody>
@@ -4591,8 +4591,8 @@
         </p:nvSpPr>
         <p:spPr>
           <a:xfrm>
-            <a:off x="8275320" y="2971800"/>
-            <a:ext cx="3566160" cy="457200"/>
+            <a:off x="8275320" y="3063240"/>
+            <a:ext cx="3566160" cy="411480"/>
           </a:xfrm>
           <a:prstGeom prst="rect">
             <a:avLst/>
@@ -4607,7 +4607,7 @@
           <a:p>
             <a:pPr algn="ctr"/>
             <a:r>
-              <a:rPr sz="2400" b="1">
+              <a:rPr sz="2200" b="1">
                 <a:solidFill>
                   <a:srgbClr val="C8102E"/>
                 </a:solidFill>
@@ -4626,8 +4626,8 @@
         </p:nvSpPr>
         <p:spPr>
           <a:xfrm>
-            <a:off x="8275320" y="3383280"/>
-            <a:ext cx="3566160" cy="365760"/>
+            <a:off x="8275320" y="3429000"/>
+            <a:ext cx="3566160" cy="320040"/>
           </a:xfrm>
           <a:prstGeom prst="rect">
             <a:avLst/>
@@ -4642,13 +4642,13 @@
           <a:p>
             <a:pPr algn="ctr"/>
             <a:r>
-              <a:rPr sz="1100" b="0">
+              <a:rPr sz="1000" b="0">
                 <a:solidFill>
                   <a:srgbClr val="64748B"/>
                 </a:solidFill>
                 <a:latin typeface="Calibri"/>
               </a:rPr>
-              <a:t>Komposit dominiert</a:t>
+              <a:t>Komposit</a:t>
             </a:r>
           </a:p>
         </p:txBody>
@@ -4729,7 +4729,7 @@
                 </a:solidFill>
                 <a:latin typeface="Calibri"/>
               </a:rPr>
-              <a:t>TAKE-AWAY:  79,5 % echte Vorgaenge | 14 % falscher Kanal (705 Mails Triage-Aufwand) | Sparten-Mix Komposit &gt; KV &gt; Leben - KV mit 29 % ueberraschend stark</a:t>
+              <a:t>TAKE-AWAY:  79,5 % der Mails sind BUe-Anfragen | 14 % im falschen Kanal (705 Mails Triage-Aufwand) | Sparten-Mix Komposit &gt; KV &gt; Leben - KV mit 29 % ueberraschend stark</a:t>
             </a:r>
           </a:p>
         </p:txBody>
@@ -4825,7 +4825,7 @@
                 </a:solidFill>
                 <a:latin typeface="Calibri"/>
               </a:rPr>
-              <a:t>Vorgaenge &amp; Top-Makler - Mengen-Konzentration</a:t>
+              <a:t>Von Mails zu Vorgaengen - und wer die Mails schickt</a:t>
             </a:r>
           </a:p>
         </p:txBody>
@@ -4860,7 +4860,7 @@
                 </a:solidFill>
                 <a:latin typeface="Calibri"/>
               </a:rPr>
-              <a:t>4.000 Neue-BUe-Mails = nur 2.495 echte Vorgaenge | Top-10 Pools = 77 % des Volumens</a:t>
+              <a:t>4.000 BUe-Anfrage-Mails (von Slide 1) konsolidieren sich zu 2.495 echten Vorgaengen  |  Top-10 Pools = 77 % des Volumens</a:t>
             </a:r>
           </a:p>
         </p:txBody>
@@ -5089,7 +5089,7 @@
                 </a:solidFill>
                 <a:latin typeface="Calibri"/>
               </a:rPr>
-              <a:t>aus 4.000 Neue-BUe-Mails</a:t>
+              <a:t>aus 4.000 BUe-Anfrage-Mails  -38 %</a:t>
             </a:r>
           </a:p>
         </p:txBody>
@@ -5621,7 +5621,7 @@
                 </a:solidFill>
                 <a:latin typeface="Calibri"/>
               </a:rPr>
-              <a:t>TOP-10 MAKLERPOOLS (Neue-BUe-Mails / Woche)</a:t>
+              <a:t>TOP-10 MAKLERPOOLS (BUe-Anfrage-Mails pro Woche)</a:t>
             </a:r>
           </a:p>
         </p:txBody>

--- a/ERGO-Mengengeruest-2Slides.pptx
+++ b/ERGO-Mengengeruest-2Slides.pptx
@@ -127,7 +127,7 @@
               <c:strCache>
                 <c:ptCount val="1"/>
                 <c:pt idx="0">
-                  <c:v>Mails</c:v>
+                  <c:v>Neuanlagen</c:v>
                 </c:pt>
               </c:strCache>
             </c:strRef>
@@ -149,7 +149,7 @@
             <c:idx val="1"/>
             <c:spPr>
               <a:solidFill>
-                <a:srgbClr val="F59E0B"/>
+                <a:srgbClr val="3377C8"/>
               </a:solidFill>
               <a:ln w="19050">
                 <a:solidFill>
@@ -162,6 +162,19 @@
             <c:idx val="2"/>
             <c:spPr>
               <a:solidFill>
+                <a:srgbClr val="10B981"/>
+              </a:solidFill>
+              <a:ln w="19050">
+                <a:solidFill>
+                  <a:srgbClr val="FFFFFF"/>
+                </a:solidFill>
+              </a:ln>
+            </c:spPr>
+          </c:dPt>
+          <c:dPt>
+            <c:idx val="3"/>
+            <c:spPr>
+              <a:solidFill>
                 <a:srgbClr val="64748B"/>
               </a:solidFill>
               <a:ln w="19050">
@@ -173,35 +186,41 @@
           </c:dPt>
           <c:cat>
             <c:strRef>
-              <c:f>Sheet1!$A$2:$A$4</c:f>
+              <c:f>Sheet1!$A$2:$A$5</c:f>
               <c:strCache>
-                <c:ptCount val="3"/>
+                <c:ptCount val="4"/>
                 <c:pt idx="0">
-                  <c:v>BUe-Anfrage-Mails (4.000)</c:v>
+                  <c:v>Komposit (1.029)</c:v>
                 </c:pt>
                 <c:pt idx="1">
-                  <c:v>Keine BUe (705)</c:v>
+                  <c:v>KV (942)</c:v>
                 </c:pt>
                 <c:pt idx="2">
-                  <c:v>BUe-Reminder (329)</c:v>
+                  <c:v>Leben (440)</c:v>
+                </c:pt>
+                <c:pt idx="3">
+                  <c:v>Mehrere / Unbekannt (84)</c:v>
                 </c:pt>
               </c:strCache>
             </c:strRef>
           </c:cat>
           <c:val>
             <c:numRef>
-              <c:f>Sheet1!$B$2:$B$4</c:f>
+              <c:f>Sheet1!$B$2:$B$5</c:f>
               <c:numCache>
                 <c:formatCode>General</c:formatCode>
-                <c:ptCount val="3"/>
+                <c:ptCount val="4"/>
                 <c:pt idx="0">
-                  <c:v>4000</c:v>
+                  <c:v>1029</c:v>
                 </c:pt>
                 <c:pt idx="1">
-                  <c:v>705</c:v>
+                  <c:v>942</c:v>
                 </c:pt>
                 <c:pt idx="2">
-                  <c:v>329</c:v>
+                  <c:v>440</c:v>
+                </c:pt>
+                <c:pt idx="3">
+                  <c:v>84</c:v>
                 </c:pt>
               </c:numCache>
             </c:numRef>
@@ -213,7 +232,7 @@
             <a:lstStyle/>
             <a:p>
               <a:pPr>
-                <a:defRPr sz="1300" b="1">
+                <a:defRPr sz="1100" b="1">
                   <a:solidFill>
                     <a:srgbClr val="FFFFFF"/>
                   </a:solidFill>
@@ -242,7 +261,7 @@
         <a:lstStyle/>
         <a:p>
           <a:pPr>
-            <a:defRPr sz="1100"/>
+            <a:defRPr sz="1000"/>
           </a:pPr>
         </a:p>
       </c:txPr>
@@ -268,184 +287,6 @@
 </file>
 
 <file path=ppt/charts/chart2.xml><?xml version="1.0" encoding="utf-8"?>
-<c:chartSpace xmlns:c="http://schemas.openxmlformats.org/drawingml/2006/chart" xmlns:a="http://schemas.openxmlformats.org/drawingml/2006/main" xmlns:r="http://schemas.openxmlformats.org/officeDocument/2006/relationships">
-  <c:date1904 val="0"/>
-  <c:roundedCorners val="0"/>
-  <c:chart>
-    <c:autoTitleDeleted val="1"/>
-    <c:plotArea>
-      <c:layout/>
-      <c:doughnutChart>
-        <c:varyColors val="1"/>
-        <c:ser>
-          <c:idx val="0"/>
-          <c:order val="0"/>
-          <c:tx>
-            <c:strRef>
-              <c:f>Sheet1!$B$1</c:f>
-              <c:strCache>
-                <c:ptCount val="1"/>
-                <c:pt idx="0">
-                  <c:v>Neue BUe</c:v>
-                </c:pt>
-              </c:strCache>
-            </c:strRef>
-          </c:tx>
-          <c:dPt>
-            <c:idx val="0"/>
-            <c:spPr>
-              <a:solidFill>
-                <a:srgbClr val="C8102E"/>
-              </a:solidFill>
-              <a:ln w="19050">
-                <a:solidFill>
-                  <a:srgbClr val="FFFFFF"/>
-                </a:solidFill>
-              </a:ln>
-            </c:spPr>
-          </c:dPt>
-          <c:dPt>
-            <c:idx val="1"/>
-            <c:spPr>
-              <a:solidFill>
-                <a:srgbClr val="3377C8"/>
-              </a:solidFill>
-              <a:ln w="19050">
-                <a:solidFill>
-                  <a:srgbClr val="FFFFFF"/>
-                </a:solidFill>
-              </a:ln>
-            </c:spPr>
-          </c:dPt>
-          <c:dPt>
-            <c:idx val="2"/>
-            <c:spPr>
-              <a:solidFill>
-                <a:srgbClr val="10B981"/>
-              </a:solidFill>
-              <a:ln w="19050">
-                <a:solidFill>
-                  <a:srgbClr val="FFFFFF"/>
-                </a:solidFill>
-              </a:ln>
-            </c:spPr>
-          </c:dPt>
-          <c:dPt>
-            <c:idx val="3"/>
-            <c:spPr>
-              <a:solidFill>
-                <a:srgbClr val="64748B"/>
-              </a:solidFill>
-              <a:ln w="19050">
-                <a:solidFill>
-                  <a:srgbClr val="FFFFFF"/>
-                </a:solidFill>
-              </a:ln>
-            </c:spPr>
-          </c:dPt>
-          <c:cat>
-            <c:strRef>
-              <c:f>Sheet1!$A$2:$A$5</c:f>
-              <c:strCache>
-                <c:ptCount val="4"/>
-                <c:pt idx="0">
-                  <c:v>Komposit (2.089)</c:v>
-                </c:pt>
-                <c:pt idx="1">
-                  <c:v>KV (1.147)</c:v>
-                </c:pt>
-                <c:pt idx="2">
-                  <c:v>Leben (662)</c:v>
-                </c:pt>
-                <c:pt idx="3">
-                  <c:v>Mehrere / Unbekannt (102)</c:v>
-                </c:pt>
-              </c:strCache>
-            </c:strRef>
-          </c:cat>
-          <c:val>
-            <c:numRef>
-              <c:f>Sheet1!$B$2:$B$5</c:f>
-              <c:numCache>
-                <c:formatCode>General</c:formatCode>
-                <c:ptCount val="4"/>
-                <c:pt idx="0">
-                  <c:v>2089</c:v>
-                </c:pt>
-                <c:pt idx="1">
-                  <c:v>1147</c:v>
-                </c:pt>
-                <c:pt idx="2">
-                  <c:v>662</c:v>
-                </c:pt>
-                <c:pt idx="3">
-                  <c:v>102</c:v>
-                </c:pt>
-              </c:numCache>
-            </c:numRef>
-          </c:val>
-        </c:ser>
-        <c:dLbls>
-          <c:txPr>
-            <a:bodyPr/>
-            <a:lstStyle/>
-            <a:p>
-              <a:pPr>
-                <a:defRPr sz="1200" b="1">
-                  <a:solidFill>
-                    <a:srgbClr val="FFFFFF"/>
-                  </a:solidFill>
-                </a:defRPr>
-              </a:pPr>
-            </a:p>
-          </c:txPr>
-          <c:showLegendKey val="0"/>
-          <c:showVal val="0"/>
-          <c:showCatName val="0"/>
-          <c:showSerName val="0"/>
-          <c:showPercent val="1"/>
-          <c:showBubbleSize val="0"/>
-          <c:showLeaderLines val="1"/>
-        </c:dLbls>
-        <c:firstSliceAng val="0"/>
-        <c:holeSize val="50"/>
-      </c:doughnutChart>
-    </c:plotArea>
-    <c:legend>
-      <c:legendPos val="b"/>
-      <c:layout/>
-      <c:overlay val="0"/>
-      <c:txPr>
-        <a:bodyPr/>
-        <a:lstStyle/>
-        <a:p>
-          <a:pPr>
-            <a:defRPr sz="1100"/>
-          </a:pPr>
-        </a:p>
-      </c:txPr>
-    </c:legend>
-    <c:plotVisOnly val="1"/>
-    <c:dispBlanksAs val="gap"/>
-    <c:showDLblsOverMax val="0"/>
-  </c:chart>
-  <c:txPr>
-    <a:bodyPr/>
-    <a:lstStyle/>
-    <a:p>
-      <a:pPr>
-        <a:defRPr sz="1800"/>
-      </a:pPr>
-      <a:endParaRPr/>
-    </a:p>
-  </c:txPr>
-  <c:externalData r:id="rId1">
-    <c:autoUpdate val="0"/>
-  </c:externalData>
-</c:chartSpace>
-</file>
-
-<file path=ppt/charts/chart3.xml><?xml version="1.0" encoding="utf-8"?>
 <c:chartSpace xmlns:c="http://schemas.openxmlformats.org/drawingml/2006/chart" xmlns:a="http://schemas.openxmlformats.org/drawingml/2006/main" xmlns:r="http://schemas.openxmlformats.org/officeDocument/2006/relationships">
   <c:date1904 val="0"/>
   <c:chart>
@@ -3711,7 +3552,7 @@
         <p:spPr>
           <a:xfrm>
             <a:off x="411480" y="228600"/>
-            <a:ext cx="10058400" cy="548640"/>
+            <a:ext cx="11430000" cy="548640"/>
           </a:xfrm>
           <a:prstGeom prst="rect">
             <a:avLst/>
@@ -3726,13 +3567,13 @@
           <a:p>
             <a:pPr algn="l"/>
             <a:r>
-              <a:rPr sz="2800" b="1">
+              <a:rPr sz="2600" b="1">
                 <a:solidFill>
                   <a:srgbClr val="1E293A"/>
                 </a:solidFill>
                 <a:latin typeface="Calibri"/>
               </a:rPr>
-              <a:t>Mengengeruest Posteingang Makler-BUe - 1 Kalenderwoche</a:t>
+              <a:t>Vom Mailsturm zu echten Neuanlagen - Mengengeruest pro Woche</a:t>
             </a:r>
           </a:p>
         </p:txBody>
@@ -3746,7 +3587,7 @@
         <p:spPr>
           <a:xfrm>
             <a:off x="411480" y="777240"/>
-            <a:ext cx="10058400" cy="320040"/>
+            <a:ext cx="11430000" cy="365760"/>
           </a:xfrm>
           <a:prstGeom prst="rect">
             <a:avLst/>
@@ -3767,7 +3608,7 @@
                 </a:solidFill>
                 <a:latin typeface="Calibri"/>
               </a:rPr>
-              <a:t>5.034 Mails Eingang  -&gt;  4.000 davon sind BUe-Anfrage-Mails  -&gt;  Konsolidierung zu Vorgaengen siehe Slide 2</a:t>
+              <a:t>5.034 Mails Eingang  -&gt;  in 4 Kategorien aufgeteilt  -&gt;  2.495 echte neue BUe-Vorgaenge / Woche</a:t>
             </a:r>
           </a:p>
         </p:txBody>
@@ -3845,21 +3686,56 @@
                 </a:solidFill>
                 <a:latin typeface="Calibri"/>
               </a:rPr>
-              <a:t>Quelle: KI-Analyse Posteingang 'Service Team Maklerauftraege', 13.04.2026-20.04.2026 (5034 Mails, eine Kalenderwoche, Mo-Mo).</a:t>
-            </a:r>
-          </a:p>
-        </p:txBody>
-      </p:sp>
-      <p:sp>
-        <p:nvSpPr>
-          <p:cNvPr id="7" name="Rectangle 6"/>
+              <a:t>Quelle: KI-Analyse Posteingang 'Service Team Maklerauftraege', 13.04.2026-20.04.2026 (5.034 Mails, eine Kalenderwoche, Mo-Mo). Vorgang = Cluster aus Mails zum selben Makler + selben Kunden.</a:t>
+            </a:r>
+          </a:p>
+        </p:txBody>
+      </p:sp>
+      <p:sp>
+        <p:nvSpPr>
+          <p:cNvPr id="7" name="TextBox 6"/>
+          <p:cNvSpPr txBox="1"/>
+          <p:nvPr/>
+        </p:nvSpPr>
+        <p:spPr>
+          <a:xfrm>
+            <a:off x="411480" y="1005840"/>
+            <a:ext cx="6949440" cy="274320"/>
+          </a:xfrm>
+          <a:prstGeom prst="rect">
+            <a:avLst/>
+          </a:prstGeom>
+          <a:noFill/>
+        </p:spPr>
+        <p:txBody>
+          <a:bodyPr wrap="square" lIns="36000" rIns="36000" tIns="18000" bIns="18000" anchor="t">
+            <a:spAutoFit/>
+          </a:bodyPr>
+          <a:lstStyle/>
+          <a:p>
+            <a:pPr algn="l"/>
+            <a:r>
+              <a:rPr sz="1100" b="1">
+                <a:solidFill>
+                  <a:srgbClr val="C8102E"/>
+                </a:solidFill>
+                <a:latin typeface="Calibri"/>
+              </a:rPr>
+              <a:t>AUFTEILUNG DER 5.034 EINGEHENDEN MAILS / WOCHE</a:t>
+            </a:r>
+          </a:p>
+        </p:txBody>
+      </p:sp>
+      <p:sp>
+        <p:nvSpPr>
+          <p:cNvPr id="8" name="Rectangle 7"/>
           <p:cNvSpPr/>
           <p:nvPr/>
         </p:nvSpPr>
         <p:spPr>
           <a:xfrm>
-            <a:off x="411480" y="1234440"/>
-            <a:ext cx="3383280" cy="1417320"/>
+            <a:off x="411480" y="1280160"/>
+            <a:ext cx="6949440" cy="1078992"/>
           </a:xfrm>
           <a:prstGeom prst="rect">
             <a:avLst/>
@@ -3898,14 +3774,58 @@
       </p:sp>
       <p:sp>
         <p:nvSpPr>
-          <p:cNvPr id="8" name="TextBox 7"/>
+          <p:cNvPr id="9" name="Rectangle 8"/>
+          <p:cNvSpPr/>
+          <p:nvPr/>
+        </p:nvSpPr>
+        <p:spPr>
+          <a:xfrm>
+            <a:off x="411480" y="1280160"/>
+            <a:ext cx="164592" cy="1078992"/>
+          </a:xfrm>
+          <a:prstGeom prst="rect">
+            <a:avLst/>
+          </a:prstGeom>
+          <a:solidFill>
+            <a:srgbClr val="94A3B8"/>
+          </a:solidFill>
+          <a:ln>
+            <a:noFill/>
+          </a:ln>
+          <a:effectLst/>
+        </p:spPr>
+        <p:style>
+          <a:lnRef idx="1">
+            <a:schemeClr val="accent1"/>
+          </a:lnRef>
+          <a:fillRef idx="3">
+            <a:schemeClr val="accent1"/>
+          </a:fillRef>
+          <a:effectRef idx="2">
+            <a:schemeClr val="accent1"/>
+          </a:effectRef>
+          <a:fontRef idx="minor">
+            <a:schemeClr val="lt1"/>
+          </a:fontRef>
+        </p:style>
+        <p:txBody>
+          <a:bodyPr rtlCol="0" anchor="ctr"/>
+          <a:lstStyle/>
+          <a:p>
+            <a:pPr algn="ctr"/>
+          </a:p>
+        </p:txBody>
+      </p:sp>
+      <p:sp>
+        <p:nvSpPr>
+          <p:cNvPr id="10" name="TextBox 9"/>
           <p:cNvSpPr txBox="1"/>
           <p:nvPr/>
         </p:nvSpPr>
         <p:spPr>
           <a:xfrm>
-            <a:off x="411480" y="1325880"/>
-            <a:ext cx="3383280" cy="320040"/>
+            <a:off x="704088" y="1353312"/>
+            <a:ext cx="6583680" cy="320040"/>
           </a:xfrm>
           <a:prstGeom prst="rect">
             <a:avLst/>
@@ -3920,27 +3840,27 @@
           <a:p>
             <a:pPr algn="l"/>
             <a:r>
-              <a:rPr sz="1100" b="1">
-                <a:solidFill>
-                  <a:srgbClr val="C8102E"/>
+              <a:rPr sz="1400" b="1">
+                <a:solidFill>
+                  <a:srgbClr val="1E293A"/>
                 </a:solidFill>
                 <a:latin typeface="Calibri"/>
               </a:rPr>
-              <a:t>EINGANG / WOCHE</a:t>
-            </a:r>
-          </a:p>
-        </p:txBody>
-      </p:sp>
-      <p:sp>
-        <p:nvSpPr>
-          <p:cNvPr id="9" name="TextBox 8"/>
+              <a:t>1. Keine BUe</a:t>
+            </a:r>
+          </a:p>
+        </p:txBody>
+      </p:sp>
+      <p:sp>
+        <p:nvSpPr>
+          <p:cNvPr id="11" name="TextBox 10"/>
           <p:cNvSpPr txBox="1"/>
           <p:nvPr/>
         </p:nvSpPr>
         <p:spPr>
           <a:xfrm>
-            <a:off x="411480" y="1600200"/>
-            <a:ext cx="3383280" cy="640080"/>
+            <a:off x="704088" y="1664208"/>
+            <a:ext cx="3657600" cy="594360"/>
           </a:xfrm>
           <a:prstGeom prst="rect">
             <a:avLst/>
@@ -3955,27 +3875,115 @@
           <a:p>
             <a:pPr algn="l"/>
             <a:r>
-              <a:rPr sz="4400" b="1">
-                <a:solidFill>
-                  <a:srgbClr val="1E293A"/>
+              <a:rPr sz="1000" b="0">
+                <a:solidFill>
+                  <a:srgbClr val="64748B"/>
                 </a:solidFill>
                 <a:latin typeface="Calibri"/>
               </a:rPr>
-              <a:t>5.034</a:t>
-            </a:r>
-          </a:p>
-        </p:txBody>
-      </p:sp>
-      <p:sp>
-        <p:nvSpPr>
-          <p:cNvPr id="10" name="TextBox 9"/>
+              <a:t>Falscher Kanal - Schaden/Antrag/Anfrage; gehoert nicht in dieses Postfach</a:t>
+            </a:r>
+          </a:p>
+        </p:txBody>
+      </p:sp>
+      <p:sp>
+        <p:nvSpPr>
+          <p:cNvPr id="12" name="Rectangle 11"/>
+          <p:cNvSpPr/>
+          <p:nvPr/>
+        </p:nvSpPr>
+        <p:spPr>
+          <a:xfrm>
+            <a:off x="704088" y="1993392"/>
+            <a:ext cx="3657600" cy="228600"/>
+          </a:xfrm>
+          <a:prstGeom prst="rect">
+            <a:avLst/>
+          </a:prstGeom>
+          <a:solidFill>
+            <a:srgbClr val="F8FAFC"/>
+          </a:solidFill>
+          <a:ln>
+            <a:noFill/>
+          </a:ln>
+          <a:effectLst/>
+        </p:spPr>
+        <p:style>
+          <a:lnRef idx="1">
+            <a:schemeClr val="accent1"/>
+          </a:lnRef>
+          <a:fillRef idx="3">
+            <a:schemeClr val="accent1"/>
+          </a:fillRef>
+          <a:effectRef idx="2">
+            <a:schemeClr val="accent1"/>
+          </a:effectRef>
+          <a:fontRef idx="minor">
+            <a:schemeClr val="lt1"/>
+          </a:fontRef>
+        </p:style>
+        <p:txBody>
+          <a:bodyPr rtlCol="0" anchor="ctr"/>
+          <a:lstStyle/>
+          <a:p>
+            <a:pPr algn="ctr"/>
+          </a:p>
+        </p:txBody>
+      </p:sp>
+      <p:sp>
+        <p:nvSpPr>
+          <p:cNvPr id="13" name="Rectangle 12"/>
+          <p:cNvSpPr/>
+          <p:nvPr/>
+        </p:nvSpPr>
+        <p:spPr>
+          <a:xfrm>
+            <a:off x="704088" y="1993392"/>
+            <a:ext cx="1032387" cy="228600"/>
+          </a:xfrm>
+          <a:prstGeom prst="rect">
+            <a:avLst/>
+          </a:prstGeom>
+          <a:solidFill>
+            <a:srgbClr val="94A3B8"/>
+          </a:solidFill>
+          <a:ln>
+            <a:noFill/>
+          </a:ln>
+          <a:effectLst/>
+        </p:spPr>
+        <p:style>
+          <a:lnRef idx="1">
+            <a:schemeClr val="accent1"/>
+          </a:lnRef>
+          <a:fillRef idx="3">
+            <a:schemeClr val="accent1"/>
+          </a:fillRef>
+          <a:effectRef idx="2">
+            <a:schemeClr val="accent1"/>
+          </a:effectRef>
+          <a:fontRef idx="minor">
+            <a:schemeClr val="lt1"/>
+          </a:fontRef>
+        </p:style>
+        <p:txBody>
+          <a:bodyPr rtlCol="0" anchor="ctr"/>
+          <a:lstStyle/>
+          <a:p>
+            <a:pPr algn="ctr"/>
+          </a:p>
+        </p:txBody>
+      </p:sp>
+      <p:sp>
+        <p:nvSpPr>
+          <p:cNvPr id="14" name="TextBox 13"/>
           <p:cNvSpPr txBox="1"/>
           <p:nvPr/>
         </p:nvSpPr>
         <p:spPr>
           <a:xfrm>
-            <a:off x="411480" y="2194560"/>
-            <a:ext cx="3383280" cy="411480"/>
+            <a:off x="5257800" y="1389888"/>
+            <a:ext cx="1920240" cy="594360"/>
           </a:xfrm>
           <a:prstGeom prst="rect">
             <a:avLst/>
@@ -3988,29 +3996,64 @@
           </a:bodyPr>
           <a:lstStyle/>
           <a:p>
-            <a:pPr algn="l"/>
-            <a:r>
-              <a:rPr sz="1200" b="0">
-                <a:solidFill>
-                  <a:srgbClr val="64748B"/>
+            <a:pPr algn="r"/>
+            <a:r>
+              <a:rPr sz="2800" b="1">
+                <a:solidFill>
+                  <a:srgbClr val="1E293A"/>
                 </a:solidFill>
                 <a:latin typeface="Calibri"/>
               </a:rPr>
-              <a:t>Mails / Woche  -  ca. 770 / Werktag</a:t>
-            </a:r>
-          </a:p>
-        </p:txBody>
-      </p:sp>
-      <p:sp>
-        <p:nvSpPr>
-          <p:cNvPr id="11" name="Rectangle 10"/>
+              <a:t>705</a:t>
+            </a:r>
+          </a:p>
+        </p:txBody>
+      </p:sp>
+      <p:sp>
+        <p:nvSpPr>
+          <p:cNvPr id="15" name="TextBox 14"/>
+          <p:cNvSpPr txBox="1"/>
+          <p:nvPr/>
+        </p:nvSpPr>
+        <p:spPr>
+          <a:xfrm>
+            <a:off x="5257800" y="1938528"/>
+            <a:ext cx="1920240" cy="365760"/>
+          </a:xfrm>
+          <a:prstGeom prst="rect">
+            <a:avLst/>
+          </a:prstGeom>
+          <a:noFill/>
+        </p:spPr>
+        <p:txBody>
+          <a:bodyPr wrap="square" lIns="36000" rIns="36000" tIns="18000" bIns="18000" anchor="t">
+            <a:spAutoFit/>
+          </a:bodyPr>
+          <a:lstStyle/>
+          <a:p>
+            <a:pPr algn="r"/>
+            <a:r>
+              <a:rPr sz="1200" b="0">
+                <a:solidFill>
+                  <a:srgbClr val="64748B"/>
+                </a:solidFill>
+                <a:latin typeface="Calibri"/>
+              </a:rPr>
+              <a:t>= 14.0 %</a:t>
+            </a:r>
+          </a:p>
+        </p:txBody>
+      </p:sp>
+      <p:sp>
+        <p:nvSpPr>
+          <p:cNvPr id="16" name="Rectangle 15"/>
           <p:cNvSpPr/>
           <p:nvPr/>
         </p:nvSpPr>
         <p:spPr>
           <a:xfrm>
-            <a:off x="411480" y="2816352"/>
-            <a:ext cx="3383280" cy="1417320"/>
+            <a:off x="411480" y="2468880"/>
+            <a:ext cx="6949440" cy="1078992"/>
           </a:xfrm>
           <a:prstGeom prst="rect">
             <a:avLst/>
@@ -4049,14 +4092,58 @@
       </p:sp>
       <p:sp>
         <p:nvSpPr>
-          <p:cNvPr id="12" name="TextBox 11"/>
+          <p:cNvPr id="17" name="Rectangle 16"/>
+          <p:cNvSpPr/>
+          <p:nvPr/>
+        </p:nvSpPr>
+        <p:spPr>
+          <a:xfrm>
+            <a:off x="411480" y="2468880"/>
+            <a:ext cx="164592" cy="1078992"/>
+          </a:xfrm>
+          <a:prstGeom prst="rect">
+            <a:avLst/>
+          </a:prstGeom>
+          <a:solidFill>
+            <a:srgbClr val="F59E0B"/>
+          </a:solidFill>
+          <a:ln>
+            <a:noFill/>
+          </a:ln>
+          <a:effectLst/>
+        </p:spPr>
+        <p:style>
+          <a:lnRef idx="1">
+            <a:schemeClr val="accent1"/>
+          </a:lnRef>
+          <a:fillRef idx="3">
+            <a:schemeClr val="accent1"/>
+          </a:fillRef>
+          <a:effectRef idx="2">
+            <a:schemeClr val="accent1"/>
+          </a:effectRef>
+          <a:fontRef idx="minor">
+            <a:schemeClr val="lt1"/>
+          </a:fontRef>
+        </p:style>
+        <p:txBody>
+          <a:bodyPr rtlCol="0" anchor="ctr"/>
+          <a:lstStyle/>
+          <a:p>
+            <a:pPr algn="ctr"/>
+          </a:p>
+        </p:txBody>
+      </p:sp>
+      <p:sp>
+        <p:nvSpPr>
+          <p:cNvPr id="18" name="TextBox 17"/>
           <p:cNvSpPr txBox="1"/>
           <p:nvPr/>
         </p:nvSpPr>
         <p:spPr>
           <a:xfrm>
-            <a:off x="411480" y="2907792"/>
-            <a:ext cx="3383280" cy="320040"/>
+            <a:off x="704088" y="2542032"/>
+            <a:ext cx="6583680" cy="320040"/>
           </a:xfrm>
           <a:prstGeom prst="rect">
             <a:avLst/>
@@ -4071,27 +4158,27 @@
           <a:p>
             <a:pPr algn="l"/>
             <a:r>
-              <a:rPr sz="1100" b="1">
-                <a:solidFill>
-                  <a:srgbClr val="C8102E"/>
+              <a:rPr sz="1400" b="1">
+                <a:solidFill>
+                  <a:srgbClr val="1E293A"/>
                 </a:solidFill>
                 <a:latin typeface="Calibri"/>
               </a:rPr>
-              <a:t>HAUPT-EINGANGSKANAL</a:t>
-            </a:r>
-          </a:p>
-        </p:txBody>
-      </p:sp>
-      <p:sp>
-        <p:nvSpPr>
-          <p:cNvPr id="13" name="TextBox 12"/>
+              <a:t>2. BUe-Reminder</a:t>
+            </a:r>
+          </a:p>
+        </p:txBody>
+      </p:sp>
+      <p:sp>
+        <p:nvSpPr>
+          <p:cNvPr id="19" name="TextBox 18"/>
           <p:cNvSpPr txBox="1"/>
           <p:nvPr/>
         </p:nvSpPr>
         <p:spPr>
           <a:xfrm>
-            <a:off x="411480" y="3182112"/>
-            <a:ext cx="3383280" cy="640080"/>
+            <a:off x="704088" y="2852928"/>
+            <a:ext cx="3657600" cy="594360"/>
           </a:xfrm>
           <a:prstGeom prst="rect">
             <a:avLst/>
@@ -4106,27 +4193,115 @@
           <a:p>
             <a:pPr algn="l"/>
             <a:r>
-              <a:rPr sz="4400" b="1">
-                <a:solidFill>
-                  <a:srgbClr val="1E293A"/>
+              <a:rPr sz="1000" b="0">
+                <a:solidFill>
+                  <a:srgbClr val="64748B"/>
                 </a:solidFill>
                 <a:latin typeface="Calibri"/>
               </a:rPr>
-              <a:t>94 %</a:t>
-            </a:r>
-          </a:p>
-        </p:txBody>
-      </p:sp>
-      <p:sp>
-        <p:nvSpPr>
-          <p:cNvPr id="14" name="TextBox 13"/>
+              <a:t>Sachstandsanfrage zu einem Vorgang aus frueherer Woche - kein neuer Fall</a:t>
+            </a:r>
+          </a:p>
+        </p:txBody>
+      </p:sp>
+      <p:sp>
+        <p:nvSpPr>
+          <p:cNvPr id="20" name="Rectangle 19"/>
+          <p:cNvSpPr/>
+          <p:nvPr/>
+        </p:nvSpPr>
+        <p:spPr>
+          <a:xfrm>
+            <a:off x="704088" y="3182112"/>
+            <a:ext cx="3657600" cy="228600"/>
+          </a:xfrm>
+          <a:prstGeom prst="rect">
+            <a:avLst/>
+          </a:prstGeom>
+          <a:solidFill>
+            <a:srgbClr val="F8FAFC"/>
+          </a:solidFill>
+          <a:ln>
+            <a:noFill/>
+          </a:ln>
+          <a:effectLst/>
+        </p:spPr>
+        <p:style>
+          <a:lnRef idx="1">
+            <a:schemeClr val="accent1"/>
+          </a:lnRef>
+          <a:fillRef idx="3">
+            <a:schemeClr val="accent1"/>
+          </a:fillRef>
+          <a:effectRef idx="2">
+            <a:schemeClr val="accent1"/>
+          </a:effectRef>
+          <a:fontRef idx="minor">
+            <a:schemeClr val="lt1"/>
+          </a:fontRef>
+        </p:style>
+        <p:txBody>
+          <a:bodyPr rtlCol="0" anchor="ctr"/>
+          <a:lstStyle/>
+          <a:p>
+            <a:pPr algn="ctr"/>
+          </a:p>
+        </p:txBody>
+      </p:sp>
+      <p:sp>
+        <p:nvSpPr>
+          <p:cNvPr id="21" name="Rectangle 20"/>
+          <p:cNvSpPr/>
+          <p:nvPr/>
+        </p:nvSpPr>
+        <p:spPr>
+          <a:xfrm>
+            <a:off x="704088" y="3182112"/>
+            <a:ext cx="479322" cy="228600"/>
+          </a:xfrm>
+          <a:prstGeom prst="rect">
+            <a:avLst/>
+          </a:prstGeom>
+          <a:solidFill>
+            <a:srgbClr val="F59E0B"/>
+          </a:solidFill>
+          <a:ln>
+            <a:noFill/>
+          </a:ln>
+          <a:effectLst/>
+        </p:spPr>
+        <p:style>
+          <a:lnRef idx="1">
+            <a:schemeClr val="accent1"/>
+          </a:lnRef>
+          <a:fillRef idx="3">
+            <a:schemeClr val="accent1"/>
+          </a:fillRef>
+          <a:effectRef idx="2">
+            <a:schemeClr val="accent1"/>
+          </a:effectRef>
+          <a:fontRef idx="minor">
+            <a:schemeClr val="lt1"/>
+          </a:fontRef>
+        </p:style>
+        <p:txBody>
+          <a:bodyPr rtlCol="0" anchor="ctr"/>
+          <a:lstStyle/>
+          <a:p>
+            <a:pPr algn="ctr"/>
+          </a:p>
+        </p:txBody>
+      </p:sp>
+      <p:sp>
+        <p:nvSpPr>
+          <p:cNvPr id="22" name="TextBox 21"/>
           <p:cNvSpPr txBox="1"/>
           <p:nvPr/>
         </p:nvSpPr>
         <p:spPr>
           <a:xfrm>
-            <a:off x="411480" y="3776472"/>
-            <a:ext cx="3383280" cy="411480"/>
+            <a:off x="5257800" y="2578608"/>
+            <a:ext cx="1920240" cy="594360"/>
           </a:xfrm>
           <a:prstGeom prst="rect">
             <a:avLst/>
@@ -4139,41 +4314,64 @@
           </a:bodyPr>
           <a:lstStyle/>
           <a:p>
-            <a:pPr algn="l"/>
-            <a:r>
-              <a:rPr sz="1100" b="0">
-                <a:solidFill>
-                  <a:srgbClr val="64748B"/>
+            <a:pPr algn="r"/>
+            <a:r>
+              <a:rPr sz="2800" b="1">
+                <a:solidFill>
+                  <a:srgbClr val="1E293A"/>
                 </a:solidFill>
                 <a:latin typeface="Calibri"/>
               </a:rPr>
-              <a:t>Service Team Maklerauftraege  (4.732 Mails)</a:t>
-            </a:r>
-          </a:p>
-          <a:p>
-            <a:pPr algn="l"/>
-            <a:r>
-              <a:rPr sz="1100" b="0">
+              <a:t>329</a:t>
+            </a:r>
+          </a:p>
+        </p:txBody>
+      </p:sp>
+      <p:sp>
+        <p:nvSpPr>
+          <p:cNvPr id="23" name="TextBox 22"/>
+          <p:cNvSpPr txBox="1"/>
+          <p:nvPr/>
+        </p:nvSpPr>
+        <p:spPr>
+          <a:xfrm>
+            <a:off x="5257800" y="3127248"/>
+            <a:ext cx="1920240" cy="365760"/>
+          </a:xfrm>
+          <a:prstGeom prst="rect">
+            <a:avLst/>
+          </a:prstGeom>
+          <a:noFill/>
+        </p:spPr>
+        <p:txBody>
+          <a:bodyPr wrap="square" lIns="36000" rIns="36000" tIns="18000" bIns="18000" anchor="t">
+            <a:spAutoFit/>
+          </a:bodyPr>
+          <a:lstStyle/>
+          <a:p>
+            <a:pPr algn="r"/>
+            <a:r>
+              <a:rPr sz="1200" b="0">
                 <a:solidFill>
                   <a:srgbClr val="64748B"/>
                 </a:solidFill>
                 <a:latin typeface="Calibri"/>
               </a:rPr>
-              <a:t>5% Bestandsuebertragungen | &lt;1% Rest</a:t>
-            </a:r>
-          </a:p>
-        </p:txBody>
-      </p:sp>
-      <p:sp>
-        <p:nvSpPr>
-          <p:cNvPr id="15" name="Rectangle 14"/>
+              <a:t>= 6.5 %</a:t>
+            </a:r>
+          </a:p>
+        </p:txBody>
+      </p:sp>
+      <p:sp>
+        <p:nvSpPr>
+          <p:cNvPr id="24" name="Rectangle 23"/>
           <p:cNvSpPr/>
           <p:nvPr/>
         </p:nvSpPr>
         <p:spPr>
           <a:xfrm>
-            <a:off x="411480" y="4398264"/>
-            <a:ext cx="3383280" cy="1417320"/>
+            <a:off x="411480" y="3657600"/>
+            <a:ext cx="6949440" cy="1078992"/>
           </a:xfrm>
           <a:prstGeom prst="rect">
             <a:avLst/>
@@ -4212,14 +4410,58 @@
       </p:sp>
       <p:sp>
         <p:nvSpPr>
-          <p:cNvPr id="16" name="TextBox 15"/>
+          <p:cNvPr id="25" name="Rectangle 24"/>
+          <p:cNvSpPr/>
+          <p:nvPr/>
+        </p:nvSpPr>
+        <p:spPr>
+          <a:xfrm>
+            <a:off x="411480" y="3657600"/>
+            <a:ext cx="164592" cy="1078992"/>
+          </a:xfrm>
+          <a:prstGeom prst="rect">
+            <a:avLst/>
+          </a:prstGeom>
+          <a:solidFill>
+            <a:srgbClr val="EA580C"/>
+          </a:solidFill>
+          <a:ln>
+            <a:noFill/>
+          </a:ln>
+          <a:effectLst/>
+        </p:spPr>
+        <p:style>
+          <a:lnRef idx="1">
+            <a:schemeClr val="accent1"/>
+          </a:lnRef>
+          <a:fillRef idx="3">
+            <a:schemeClr val="accent1"/>
+          </a:fillRef>
+          <a:effectRef idx="2">
+            <a:schemeClr val="accent1"/>
+          </a:effectRef>
+          <a:fontRef idx="minor">
+            <a:schemeClr val="lt1"/>
+          </a:fontRef>
+        </p:style>
+        <p:txBody>
+          <a:bodyPr rtlCol="0" anchor="ctr"/>
+          <a:lstStyle/>
+          <a:p>
+            <a:pPr algn="ctr"/>
+          </a:p>
+        </p:txBody>
+      </p:sp>
+      <p:sp>
+        <p:nvSpPr>
+          <p:cNvPr id="26" name="TextBox 25"/>
           <p:cNvSpPr txBox="1"/>
           <p:nvPr/>
         </p:nvSpPr>
         <p:spPr>
           <a:xfrm>
-            <a:off x="411480" y="4489704"/>
-            <a:ext cx="3383280" cy="320040"/>
+            <a:off x="704088" y="3730752"/>
+            <a:ext cx="6583680" cy="320040"/>
           </a:xfrm>
           <a:prstGeom prst="rect">
             <a:avLst/>
@@ -4234,27 +4476,27 @@
           <a:p>
             <a:pPr algn="l"/>
             <a:r>
-              <a:rPr sz="1100" b="1">
-                <a:solidFill>
-                  <a:srgbClr val="C8102E"/>
+              <a:rPr sz="1400" b="1">
+                <a:solidFill>
+                  <a:srgbClr val="1E293A"/>
                 </a:solidFill>
                 <a:latin typeface="Calibri"/>
               </a:rPr>
-              <a:t>DAVON BUe-ANFRAGE-MAILS</a:t>
-            </a:r>
-          </a:p>
-        </p:txBody>
-      </p:sp>
-      <p:sp>
-        <p:nvSpPr>
-          <p:cNvPr id="17" name="TextBox 16"/>
+              <a:t>3. Nachreichungen</a:t>
+            </a:r>
+          </a:p>
+        </p:txBody>
+      </p:sp>
+      <p:sp>
+        <p:nvSpPr>
+          <p:cNvPr id="27" name="TextBox 26"/>
           <p:cNvSpPr txBox="1"/>
           <p:nvPr/>
         </p:nvSpPr>
         <p:spPr>
           <a:xfrm>
-            <a:off x="411480" y="4764024"/>
-            <a:ext cx="3383280" cy="640080"/>
+            <a:off x="704088" y="4041648"/>
+            <a:ext cx="3657600" cy="594360"/>
           </a:xfrm>
           <a:prstGeom prst="rect">
             <a:avLst/>
@@ -4269,27 +4511,115 @@
           <a:p>
             <a:pPr algn="l"/>
             <a:r>
-              <a:rPr sz="4400" b="1">
-                <a:solidFill>
-                  <a:srgbClr val="1E293A"/>
+              <a:rPr sz="1000" b="0">
+                <a:solidFill>
+                  <a:srgbClr val="64748B"/>
                 </a:solidFill>
                 <a:latin typeface="Calibri"/>
               </a:rPr>
-              <a:t>4.000</a:t>
-            </a:r>
-          </a:p>
-        </p:txBody>
-      </p:sp>
-      <p:sp>
-        <p:nvSpPr>
-          <p:cNvPr id="18" name="TextBox 17"/>
+              <a:t>Folge-Mails zu einem Vorgang, der in DIESER Woche bereits geoeffnet wurde</a:t>
+            </a:r>
+          </a:p>
+        </p:txBody>
+      </p:sp>
+      <p:sp>
+        <p:nvSpPr>
+          <p:cNvPr id="28" name="Rectangle 27"/>
+          <p:cNvSpPr/>
+          <p:nvPr/>
+        </p:nvSpPr>
+        <p:spPr>
+          <a:xfrm>
+            <a:off x="704088" y="4370832"/>
+            <a:ext cx="3657600" cy="228600"/>
+          </a:xfrm>
+          <a:prstGeom prst="rect">
+            <a:avLst/>
+          </a:prstGeom>
+          <a:solidFill>
+            <a:srgbClr val="F8FAFC"/>
+          </a:solidFill>
+          <a:ln>
+            <a:noFill/>
+          </a:ln>
+          <a:effectLst/>
+        </p:spPr>
+        <p:style>
+          <a:lnRef idx="1">
+            <a:schemeClr val="accent1"/>
+          </a:lnRef>
+          <a:fillRef idx="3">
+            <a:schemeClr val="accent1"/>
+          </a:fillRef>
+          <a:effectRef idx="2">
+            <a:schemeClr val="accent1"/>
+          </a:effectRef>
+          <a:fontRef idx="minor">
+            <a:schemeClr val="lt1"/>
+          </a:fontRef>
+        </p:style>
+        <p:txBody>
+          <a:bodyPr rtlCol="0" anchor="ctr"/>
+          <a:lstStyle/>
+          <a:p>
+            <a:pPr algn="ctr"/>
+          </a:p>
+        </p:txBody>
+      </p:sp>
+      <p:sp>
+        <p:nvSpPr>
+          <p:cNvPr id="29" name="Rectangle 28"/>
+          <p:cNvSpPr/>
+          <p:nvPr/>
+        </p:nvSpPr>
+        <p:spPr>
+          <a:xfrm>
+            <a:off x="704088" y="4370832"/>
+            <a:ext cx="2204883" cy="228600"/>
+          </a:xfrm>
+          <a:prstGeom prst="rect">
+            <a:avLst/>
+          </a:prstGeom>
+          <a:solidFill>
+            <a:srgbClr val="EA580C"/>
+          </a:solidFill>
+          <a:ln>
+            <a:noFill/>
+          </a:ln>
+          <a:effectLst/>
+        </p:spPr>
+        <p:style>
+          <a:lnRef idx="1">
+            <a:schemeClr val="accent1"/>
+          </a:lnRef>
+          <a:fillRef idx="3">
+            <a:schemeClr val="accent1"/>
+          </a:fillRef>
+          <a:effectRef idx="2">
+            <a:schemeClr val="accent1"/>
+          </a:effectRef>
+          <a:fontRef idx="minor">
+            <a:schemeClr val="lt1"/>
+          </a:fontRef>
+        </p:style>
+        <p:txBody>
+          <a:bodyPr rtlCol="0" anchor="ctr"/>
+          <a:lstStyle/>
+          <a:p>
+            <a:pPr algn="ctr"/>
+          </a:p>
+        </p:txBody>
+      </p:sp>
+      <p:sp>
+        <p:nvSpPr>
+          <p:cNvPr id="30" name="TextBox 29"/>
           <p:cNvSpPr txBox="1"/>
           <p:nvPr/>
         </p:nvSpPr>
         <p:spPr>
           <a:xfrm>
-            <a:off x="411480" y="5358384"/>
-            <a:ext cx="3383280" cy="411480"/>
+            <a:off x="5257800" y="3767328"/>
+            <a:ext cx="1920240" cy="594360"/>
           </a:xfrm>
           <a:prstGeom prst="rect">
             <a:avLst/>
@@ -4302,29 +4632,64 @@
           </a:bodyPr>
           <a:lstStyle/>
           <a:p>
-            <a:pPr algn="l"/>
-            <a:r>
-              <a:rPr sz="1200" b="0">
-                <a:solidFill>
-                  <a:srgbClr val="64748B"/>
+            <a:pPr algn="r"/>
+            <a:r>
+              <a:rPr sz="2800" b="1">
+                <a:solidFill>
+                  <a:srgbClr val="1E293A"/>
                 </a:solidFill>
                 <a:latin typeface="Calibri"/>
               </a:rPr>
-              <a:t>= 79,5 % der Mails  -  Rest = Triage-Aufwand</a:t>
-            </a:r>
-          </a:p>
-        </p:txBody>
-      </p:sp>
-      <p:sp>
-        <p:nvSpPr>
-          <p:cNvPr id="19" name="Rectangle 18"/>
+              <a:t>1.505</a:t>
+            </a:r>
+          </a:p>
+        </p:txBody>
+      </p:sp>
+      <p:sp>
+        <p:nvSpPr>
+          <p:cNvPr id="31" name="TextBox 30"/>
+          <p:cNvSpPr txBox="1"/>
+          <p:nvPr/>
+        </p:nvSpPr>
+        <p:spPr>
+          <a:xfrm>
+            <a:off x="5257800" y="4315968"/>
+            <a:ext cx="1920240" cy="365760"/>
+          </a:xfrm>
+          <a:prstGeom prst="rect">
+            <a:avLst/>
+          </a:prstGeom>
+          <a:noFill/>
+        </p:spPr>
+        <p:txBody>
+          <a:bodyPr wrap="square" lIns="36000" rIns="36000" tIns="18000" bIns="18000" anchor="t">
+            <a:spAutoFit/>
+          </a:bodyPr>
+          <a:lstStyle/>
+          <a:p>
+            <a:pPr algn="r"/>
+            <a:r>
+              <a:rPr sz="1200" b="0">
+                <a:solidFill>
+                  <a:srgbClr val="64748B"/>
+                </a:solidFill>
+                <a:latin typeface="Calibri"/>
+              </a:rPr>
+              <a:t>= 29.9 %</a:t>
+            </a:r>
+          </a:p>
+        </p:txBody>
+      </p:sp>
+      <p:sp>
+        <p:nvSpPr>
+          <p:cNvPr id="32" name="Rectangle 31"/>
           <p:cNvSpPr/>
           <p:nvPr/>
         </p:nvSpPr>
         <p:spPr>
           <a:xfrm>
-            <a:off x="4069080" y="1234440"/>
-            <a:ext cx="3931920" cy="4572000"/>
+            <a:off x="411480" y="4846320"/>
+            <a:ext cx="6949440" cy="1078992"/>
           </a:xfrm>
           <a:prstGeom prst="rect">
             <a:avLst/>
@@ -4363,14 +4728,58 @@
       </p:sp>
       <p:sp>
         <p:nvSpPr>
-          <p:cNvPr id="20" name="TextBox 19"/>
+          <p:cNvPr id="33" name="Rectangle 32"/>
+          <p:cNvSpPr/>
+          <p:nvPr/>
+        </p:nvSpPr>
+        <p:spPr>
+          <a:xfrm>
+            <a:off x="411480" y="4846320"/>
+            <a:ext cx="164592" cy="1078992"/>
+          </a:xfrm>
+          <a:prstGeom prst="rect">
+            <a:avLst/>
+          </a:prstGeom>
+          <a:solidFill>
+            <a:srgbClr val="C8102E"/>
+          </a:solidFill>
+          <a:ln>
+            <a:noFill/>
+          </a:ln>
+          <a:effectLst/>
+        </p:spPr>
+        <p:style>
+          <a:lnRef idx="1">
+            <a:schemeClr val="accent1"/>
+          </a:lnRef>
+          <a:fillRef idx="3">
+            <a:schemeClr val="accent1"/>
+          </a:fillRef>
+          <a:effectRef idx="2">
+            <a:schemeClr val="accent1"/>
+          </a:effectRef>
+          <a:fontRef idx="minor">
+            <a:schemeClr val="lt1"/>
+          </a:fontRef>
+        </p:style>
+        <p:txBody>
+          <a:bodyPr rtlCol="0" anchor="ctr"/>
+          <a:lstStyle/>
+          <a:p>
+            <a:pPr algn="ctr"/>
+          </a:p>
+        </p:txBody>
+      </p:sp>
+      <p:sp>
+        <p:nvSpPr>
+          <p:cNvPr id="34" name="TextBox 33"/>
           <p:cNvSpPr txBox="1"/>
           <p:nvPr/>
         </p:nvSpPr>
         <p:spPr>
           <a:xfrm>
-            <a:off x="4069080" y="1325880"/>
-            <a:ext cx="3931920" cy="365760"/>
+            <a:off x="704088" y="4919472"/>
+            <a:ext cx="6583680" cy="320040"/>
           </a:xfrm>
           <a:prstGeom prst="rect">
             <a:avLst/>
@@ -4383,47 +4792,29 @@
           </a:bodyPr>
           <a:lstStyle/>
           <a:p>
-            <a:pPr algn="ctr"/>
-            <a:r>
-              <a:rPr sz="1300" b="1">
-                <a:solidFill>
-                  <a:srgbClr val="C8102E"/>
+            <a:pPr algn="l"/>
+            <a:r>
+              <a:rPr sz="1400" b="1">
+                <a:solidFill>
+                  <a:srgbClr val="1E293A"/>
                 </a:solidFill>
                 <a:latin typeface="Calibri"/>
               </a:rPr>
-              <a:t>1. TRIAGE der 5.034 Mails</a:t>
-            </a:r>
-          </a:p>
-        </p:txBody>
-      </p:sp>
-      <p:graphicFrame>
-        <p:nvGraphicFramePr>
-          <p:cNvPr id="21" name="Chart 20"/>
-          <p:cNvGraphicFramePr>
-            <a:graphicFrameLocks noGrp="1"/>
-          </p:cNvGraphicFramePr>
-          <p:nvPr/>
-        </p:nvGraphicFramePr>
-        <p:xfrm>
-          <a:off x="4251960" y="1737360"/>
-          <a:ext cx="3566160" cy="3200400"/>
-        </p:xfrm>
-        <a:graphic>
-          <a:graphicData uri="http://schemas.openxmlformats.org/drawingml/2006/chart">
-            <c:chart xmlns:c="http://schemas.openxmlformats.org/drawingml/2006/chart" r:id="rId2"/>
-          </a:graphicData>
-        </a:graphic>
-      </p:graphicFrame>
-      <p:sp>
-        <p:nvSpPr>
-          <p:cNvPr id="22" name="TextBox 21"/>
+              <a:t>4. ECHTE NEUANLAGEN</a:t>
+            </a:r>
+          </a:p>
+        </p:txBody>
+      </p:sp>
+      <p:sp>
+        <p:nvSpPr>
+          <p:cNvPr id="35" name="TextBox 34"/>
           <p:cNvSpPr txBox="1"/>
           <p:nvPr/>
         </p:nvSpPr>
         <p:spPr>
           <a:xfrm>
-            <a:off x="4251960" y="2971800"/>
-            <a:ext cx="3566160" cy="457200"/>
+            <a:off x="704088" y="5230368"/>
+            <a:ext cx="3657600" cy="594360"/>
           </a:xfrm>
           <a:prstGeom prst="rect">
             <a:avLst/>
@@ -4436,29 +4827,117 @@
           </a:bodyPr>
           <a:lstStyle/>
           <a:p>
-            <a:pPr algn="ctr"/>
-            <a:r>
-              <a:rPr sz="2400" b="1">
-                <a:solidFill>
-                  <a:srgbClr val="C8102E"/>
+            <a:pPr algn="l"/>
+            <a:r>
+              <a:rPr sz="1000" b="0">
+                <a:solidFill>
+                  <a:srgbClr val="64748B"/>
                 </a:solidFill>
                 <a:latin typeface="Calibri"/>
               </a:rPr>
-              <a:t>79,5 %</a:t>
-            </a:r>
-          </a:p>
-        </p:txBody>
-      </p:sp>
-      <p:sp>
-        <p:nvSpPr>
-          <p:cNvPr id="23" name="TextBox 22"/>
+              <a:t>Neue BUe-Vorgaenge pro Woche  =  zu eroeffnende Faelle in der Bearbeitung</a:t>
+            </a:r>
+          </a:p>
+        </p:txBody>
+      </p:sp>
+      <p:sp>
+        <p:nvSpPr>
+          <p:cNvPr id="36" name="Rectangle 35"/>
+          <p:cNvSpPr/>
+          <p:nvPr/>
+        </p:nvSpPr>
+        <p:spPr>
+          <a:xfrm>
+            <a:off x="704088" y="5559552"/>
+            <a:ext cx="3657600" cy="228600"/>
+          </a:xfrm>
+          <a:prstGeom prst="rect">
+            <a:avLst/>
+          </a:prstGeom>
+          <a:solidFill>
+            <a:srgbClr val="F8FAFC"/>
+          </a:solidFill>
+          <a:ln>
+            <a:noFill/>
+          </a:ln>
+          <a:effectLst/>
+        </p:spPr>
+        <p:style>
+          <a:lnRef idx="1">
+            <a:schemeClr val="accent1"/>
+          </a:lnRef>
+          <a:fillRef idx="3">
+            <a:schemeClr val="accent1"/>
+          </a:fillRef>
+          <a:effectRef idx="2">
+            <a:schemeClr val="accent1"/>
+          </a:effectRef>
+          <a:fontRef idx="minor">
+            <a:schemeClr val="lt1"/>
+          </a:fontRef>
+        </p:style>
+        <p:txBody>
+          <a:bodyPr rtlCol="0" anchor="ctr"/>
+          <a:lstStyle/>
+          <a:p>
+            <a:pPr algn="ctr"/>
+          </a:p>
+        </p:txBody>
+      </p:sp>
+      <p:sp>
+        <p:nvSpPr>
+          <p:cNvPr id="37" name="Rectangle 36"/>
+          <p:cNvSpPr/>
+          <p:nvPr/>
+        </p:nvSpPr>
+        <p:spPr>
+          <a:xfrm>
+            <a:off x="704088" y="5559552"/>
+            <a:ext cx="3657600" cy="228600"/>
+          </a:xfrm>
+          <a:prstGeom prst="rect">
+            <a:avLst/>
+          </a:prstGeom>
+          <a:solidFill>
+            <a:srgbClr val="C8102E"/>
+          </a:solidFill>
+          <a:ln>
+            <a:noFill/>
+          </a:ln>
+          <a:effectLst/>
+        </p:spPr>
+        <p:style>
+          <a:lnRef idx="1">
+            <a:schemeClr val="accent1"/>
+          </a:lnRef>
+          <a:fillRef idx="3">
+            <a:schemeClr val="accent1"/>
+          </a:fillRef>
+          <a:effectRef idx="2">
+            <a:schemeClr val="accent1"/>
+          </a:effectRef>
+          <a:fontRef idx="minor">
+            <a:schemeClr val="lt1"/>
+          </a:fontRef>
+        </p:style>
+        <p:txBody>
+          <a:bodyPr rtlCol="0" anchor="ctr"/>
+          <a:lstStyle/>
+          <a:p>
+            <a:pPr algn="ctr"/>
+          </a:p>
+        </p:txBody>
+      </p:sp>
+      <p:sp>
+        <p:nvSpPr>
+          <p:cNvPr id="38" name="TextBox 37"/>
           <p:cNvSpPr txBox="1"/>
           <p:nvPr/>
         </p:nvSpPr>
         <p:spPr>
           <a:xfrm>
-            <a:off x="4251960" y="3383280"/>
-            <a:ext cx="3566160" cy="365760"/>
+            <a:off x="5257800" y="4956048"/>
+            <a:ext cx="1920240" cy="594360"/>
           </a:xfrm>
           <a:prstGeom prst="rect">
             <a:avLst/>
@@ -4471,29 +4950,64 @@
           </a:bodyPr>
           <a:lstStyle/>
           <a:p>
-            <a:pPr algn="ctr"/>
-            <a:r>
-              <a:rPr sz="1100" b="0">
-                <a:solidFill>
-                  <a:srgbClr val="64748B"/>
+            <a:pPr algn="r"/>
+            <a:r>
+              <a:rPr sz="2800" b="1">
+                <a:solidFill>
+                  <a:srgbClr val="C8102E"/>
                 </a:solidFill>
                 <a:latin typeface="Calibri"/>
               </a:rPr>
-              <a:t>BUe-Mails</a:t>
-            </a:r>
-          </a:p>
-        </p:txBody>
-      </p:sp>
-      <p:sp>
-        <p:nvSpPr>
-          <p:cNvPr id="24" name="Rectangle 23"/>
+              <a:t>2.495</a:t>
+            </a:r>
+          </a:p>
+        </p:txBody>
+      </p:sp>
+      <p:sp>
+        <p:nvSpPr>
+          <p:cNvPr id="39" name="TextBox 38"/>
+          <p:cNvSpPr txBox="1"/>
+          <p:nvPr/>
+        </p:nvSpPr>
+        <p:spPr>
+          <a:xfrm>
+            <a:off x="5257800" y="5504688"/>
+            <a:ext cx="1920240" cy="365760"/>
+          </a:xfrm>
+          <a:prstGeom prst="rect">
+            <a:avLst/>
+          </a:prstGeom>
+          <a:noFill/>
+        </p:spPr>
+        <p:txBody>
+          <a:bodyPr wrap="square" lIns="36000" rIns="36000" tIns="18000" bIns="18000" anchor="t">
+            <a:spAutoFit/>
+          </a:bodyPr>
+          <a:lstStyle/>
+          <a:p>
+            <a:pPr algn="r"/>
+            <a:r>
+              <a:rPr sz="1200" b="1">
+                <a:solidFill>
+                  <a:srgbClr val="64748B"/>
+                </a:solidFill>
+                <a:latin typeface="Calibri"/>
+              </a:rPr>
+              <a:t>= 49.6 %</a:t>
+            </a:r>
+          </a:p>
+        </p:txBody>
+      </p:sp>
+      <p:sp>
+        <p:nvSpPr>
+          <p:cNvPr id="40" name="Rectangle 39"/>
           <p:cNvSpPr/>
           <p:nvPr/>
         </p:nvSpPr>
         <p:spPr>
           <a:xfrm>
-            <a:off x="8092440" y="1234440"/>
-            <a:ext cx="3931920" cy="4572000"/>
+            <a:off x="7543800" y="1005840"/>
+            <a:ext cx="4434840" cy="2926080"/>
           </a:xfrm>
           <a:prstGeom prst="rect">
             <a:avLst/>
@@ -4532,14 +5046,14 @@
       </p:sp>
       <p:sp>
         <p:nvSpPr>
-          <p:cNvPr id="25" name="TextBox 24"/>
+          <p:cNvPr id="41" name="TextBox 40"/>
           <p:cNvSpPr txBox="1"/>
           <p:nvPr/>
         </p:nvSpPr>
         <p:spPr>
           <a:xfrm>
-            <a:off x="8092440" y="1325880"/>
-            <a:ext cx="3931920" cy="365760"/>
+            <a:off x="7543800" y="1097280"/>
+            <a:ext cx="4434840" cy="365760"/>
           </a:xfrm>
           <a:prstGeom prst="rect">
             <a:avLst/>
@@ -4554,45 +5068,91 @@
           <a:p>
             <a:pPr algn="ctr"/>
             <a:r>
-              <a:rPr sz="1300" b="1">
+              <a:rPr sz="1200" b="1">
                 <a:solidFill>
                   <a:srgbClr val="C8102E"/>
                 </a:solidFill>
                 <a:latin typeface="Calibri"/>
               </a:rPr>
-              <a:t>2. SPARTEN-SPLIT der 4.000 BUe-Mails</a:t>
+              <a:t>SPARTEN-SPLIT der 2.495 Neuanlagen</a:t>
             </a:r>
           </a:p>
         </p:txBody>
       </p:sp>
       <p:graphicFrame>
         <p:nvGraphicFramePr>
-          <p:cNvPr id="26" name="Chart 25"/>
+          <p:cNvPr id="42" name="Chart 41"/>
           <p:cNvGraphicFramePr>
             <a:graphicFrameLocks noGrp="1"/>
           </p:cNvGraphicFramePr>
           <p:nvPr/>
         </p:nvGraphicFramePr>
         <p:xfrm>
-          <a:off x="8275320" y="1737360"/>
-          <a:ext cx="3566160" cy="3200400"/>
+          <a:off x="7680960" y="1463040"/>
+          <a:ext cx="4160520" cy="2331720"/>
         </p:xfrm>
         <a:graphic>
           <a:graphicData uri="http://schemas.openxmlformats.org/drawingml/2006/chart">
-            <c:chart xmlns:c="http://schemas.openxmlformats.org/drawingml/2006/chart" r:id="rId3"/>
+            <c:chart xmlns:c="http://schemas.openxmlformats.org/drawingml/2006/chart" r:id="rId2"/>
           </a:graphicData>
         </a:graphic>
       </p:graphicFrame>
       <p:sp>
         <p:nvSpPr>
-          <p:cNvPr id="27" name="TextBox 26"/>
+          <p:cNvPr id="43" name="Rectangle 42"/>
+          <p:cNvSpPr/>
+          <p:nvPr/>
+        </p:nvSpPr>
+        <p:spPr>
+          <a:xfrm>
+            <a:off x="7543800" y="4069080"/>
+            <a:ext cx="4434840" cy="2606040"/>
+          </a:xfrm>
+          <a:prstGeom prst="rect">
+            <a:avLst/>
+          </a:prstGeom>
+          <a:solidFill>
+            <a:srgbClr val="F8FAFC"/>
+          </a:solidFill>
+          <a:ln w="9525">
+            <a:solidFill>
+              <a:srgbClr val="E2E8F0"/>
+            </a:solidFill>
+          </a:ln>
+          <a:effectLst/>
+        </p:spPr>
+        <p:style>
+          <a:lnRef idx="1">
+            <a:schemeClr val="accent1"/>
+          </a:lnRef>
+          <a:fillRef idx="3">
+            <a:schemeClr val="accent1"/>
+          </a:fillRef>
+          <a:effectRef idx="2">
+            <a:schemeClr val="accent1"/>
+          </a:effectRef>
+          <a:fontRef idx="minor">
+            <a:schemeClr val="lt1"/>
+          </a:fontRef>
+        </p:style>
+        <p:txBody>
+          <a:bodyPr rtlCol="0" anchor="ctr"/>
+          <a:lstStyle/>
+          <a:p>
+            <a:pPr algn="ctr"/>
+          </a:p>
+        </p:txBody>
+      </p:sp>
+      <p:sp>
+        <p:nvSpPr>
+          <p:cNvPr id="44" name="TextBox 43"/>
           <p:cNvSpPr txBox="1"/>
           <p:nvPr/>
         </p:nvSpPr>
         <p:spPr>
           <a:xfrm>
-            <a:off x="8275320" y="3063240"/>
-            <a:ext cx="3566160" cy="411480"/>
+            <a:off x="7726680" y="4206240"/>
+            <a:ext cx="4069080" cy="320040"/>
           </a:xfrm>
           <a:prstGeom prst="rect">
             <a:avLst/>
@@ -4605,29 +5165,29 @@
           </a:bodyPr>
           <a:lstStyle/>
           <a:p>
-            <a:pPr algn="ctr"/>
-            <a:r>
-              <a:rPr sz="2200" b="1">
+            <a:pPr algn="l"/>
+            <a:r>
+              <a:rPr sz="1100" b="1">
                 <a:solidFill>
                   <a:srgbClr val="C8102E"/>
                 </a:solidFill>
                 <a:latin typeface="Calibri"/>
               </a:rPr>
-              <a:t>52 %</a:t>
-            </a:r>
-          </a:p>
-        </p:txBody>
-      </p:sp>
-      <p:sp>
-        <p:nvSpPr>
-          <p:cNvPr id="28" name="TextBox 27"/>
+              <a:t>MAIL-PERSPEKTIVE vs. VORGANGS-PERSPEKTIVE</a:t>
+            </a:r>
+          </a:p>
+        </p:txBody>
+      </p:sp>
+      <p:sp>
+        <p:nvSpPr>
+          <p:cNvPr id="45" name="TextBox 44"/>
           <p:cNvSpPr txBox="1"/>
           <p:nvPr/>
         </p:nvSpPr>
         <p:spPr>
           <a:xfrm>
-            <a:off x="8275320" y="3429000"/>
-            <a:ext cx="3566160" cy="320040"/>
+            <a:off x="7726680" y="4572000"/>
+            <a:ext cx="4069080" cy="2103120"/>
           </a:xfrm>
           <a:prstGeom prst="rect">
             <a:avLst/>
@@ -4640,22 +5200,70 @@
           </a:bodyPr>
           <a:lstStyle/>
           <a:p>
-            <a:pPr algn="ctr"/>
+            <a:pPr algn="l"/>
             <a:r>
               <a:rPr sz="1000" b="0">
                 <a:solidFill>
-                  <a:srgbClr val="64748B"/>
+                  <a:srgbClr val="1E293A"/>
                 </a:solidFill>
                 <a:latin typeface="Calibri"/>
               </a:rPr>
-              <a:t>Komposit</a:t>
-            </a:r>
-          </a:p>
-        </p:txBody>
-      </p:sp>
-      <p:sp>
-        <p:nvSpPr>
-          <p:cNvPr id="29" name="Rectangle 28"/>
+              <a:t>Auf MAIL-Ebene dominiert Komposit (52 %), weil Komposit-Vorgaenge oft Multi-Mail-Cluster sind (Nachreichungen).</a:t>
+            </a:r>
+          </a:p>
+          <a:p>
+            <a:pPr algn="l"/>
+            <a:r>
+              <a:rPr sz="1000" b="0">
+                <a:solidFill>
+                  <a:srgbClr val="1E293A"/>
+                </a:solidFill>
+                <a:latin typeface="Calibri"/>
+              </a:rPr>
+              <a:t/>
+            </a:r>
+          </a:p>
+          <a:p>
+            <a:pPr algn="l"/>
+            <a:r>
+              <a:rPr sz="1000" b="0">
+                <a:solidFill>
+                  <a:srgbClr val="1E293A"/>
+                </a:solidFill>
+                <a:latin typeface="Calibri"/>
+              </a:rPr>
+              <a:t>Auf VORGANGS-Ebene ist KV (38 %) fast gleichauf mit Komposit (41 %) - KV-Vorgaenge werden meist in 1 Mail erledigt.</a:t>
+            </a:r>
+          </a:p>
+          <a:p>
+            <a:pPr algn="l"/>
+            <a:r>
+              <a:rPr sz="1000" b="0">
+                <a:solidFill>
+                  <a:srgbClr val="1E293A"/>
+                </a:solidFill>
+                <a:latin typeface="Calibri"/>
+              </a:rPr>
+              <a:t/>
+            </a:r>
+          </a:p>
+          <a:p>
+            <a:pPr algn="l"/>
+            <a:r>
+              <a:rPr sz="1000" b="0">
+                <a:solidFill>
+                  <a:srgbClr val="1E293A"/>
+                </a:solidFill>
+                <a:latin typeface="Calibri"/>
+              </a:rPr>
+              <a:t>=&gt; KV ist als Sparte unterschaetzt, wenn man nur Mails zaehlt.</a:t>
+            </a:r>
+          </a:p>
+        </p:txBody>
+      </p:sp>
+      <p:sp>
+        <p:nvSpPr>
+          <p:cNvPr id="46" name="Rectangle 45"/>
           <p:cNvSpPr/>
           <p:nvPr/>
         </p:nvSpPr>
@@ -4701,7 +5309,7 @@
       </p:sp>
       <p:sp>
         <p:nvSpPr>
-          <p:cNvPr id="30" name="TextBox 29"/>
+          <p:cNvPr id="47" name="TextBox 46"/>
           <p:cNvSpPr txBox="1"/>
           <p:nvPr/>
         </p:nvSpPr>
@@ -4729,7 +5337,7 @@
                 </a:solidFill>
                 <a:latin typeface="Calibri"/>
               </a:rPr>
-              <a:t>TAKE-AWAY:  79,5 % der Mails sind BUe-Anfragen | 14 % im falschen Kanal (705 Mails Triage-Aufwand) | Sparten-Mix Komposit &gt; KV &gt; Leben - KV mit 29 % ueberraschend stark</a:t>
+              <a:t>TAKE-AWAY:  Nur jede 2. Mail ist eine echte Neuanlage (49,6 %)  |  ca. 2.500 neue BUe-Vorgaenge / Woche  |  jede 3. Mail (30 %) ist Nachreichung zu schon offenem Vorgang</a:t>
             </a:r>
           </a:p>
         </p:txBody>
@@ -4804,7 +5412,7 @@
         <p:spPr>
           <a:xfrm>
             <a:off x="411480" y="228600"/>
-            <a:ext cx="10058400" cy="548640"/>
+            <a:ext cx="11430000" cy="548640"/>
           </a:xfrm>
           <a:prstGeom prst="rect">
             <a:avLst/>
@@ -4819,13 +5427,13 @@
           <a:p>
             <a:pPr algn="l"/>
             <a:r>
-              <a:rPr sz="2800" b="1">
+              <a:rPr sz="2600" b="1">
                 <a:solidFill>
                   <a:srgbClr val="1E293A"/>
                 </a:solidFill>
                 <a:latin typeface="Calibri"/>
               </a:rPr>
-              <a:t>Von Mails zu Vorgaengen - und wer die Mails schickt</a:t>
+              <a:t>Wer schickt die 2.495 Neuanlagen? - Konzentration auf Top-Maklerpools</a:t>
             </a:r>
           </a:p>
         </p:txBody>
@@ -4839,7 +5447,7 @@
         <p:spPr>
           <a:xfrm>
             <a:off x="411480" y="777240"/>
-            <a:ext cx="10058400" cy="320040"/>
+            <a:ext cx="11430000" cy="365760"/>
           </a:xfrm>
           <a:prstGeom prst="rect">
             <a:avLst/>
@@ -4860,7 +5468,7 @@
                 </a:solidFill>
                 <a:latin typeface="Calibri"/>
               </a:rPr>
-              <a:t>4.000 BUe-Anfrage-Mails (von Slide 1) konsolidieren sich zu 2.495 echten Vorgaengen  |  Top-10 Pools = 77 % des Volumens</a:t>
+              <a:t>60 % aller Neuanlagen kommen von 3 Pools  |  JDC allein steuert 38 %  |  Multi-Mail-Cluster = Nachreichungs-Hebel</a:t>
             </a:r>
           </a:p>
         </p:txBody>
@@ -4938,7 +5546,7 @@
                 </a:solidFill>
                 <a:latin typeface="Calibri"/>
               </a:rPr>
-              <a:t>Quelle: KI-Analyse Posteingang 'Service Team Maklerauftraege', 13.04.2026-20.04.2026 (5034 Mails, eine Kalenderwoche, Mo-Mo).</a:t>
+              <a:t>Quelle: KI-Analyse Posteingang 'Service Team Maklerauftraege', 13.04.2026-20.04.2026 (5.034 Mails, eine Kalenderwoche, Mo-Mo). Vorgang = Cluster aus Mails zum selben Makler + selben Kunden.</a:t>
             </a:r>
           </a:p>
         </p:txBody>
@@ -5019,7 +5627,7 @@
                 </a:solidFill>
                 <a:latin typeface="Calibri"/>
               </a:rPr>
-              <a:t>ECHTE VORGAENGE</a:t>
+              <a:t>NEUE VORGAENGE / WOCHE</a:t>
             </a:r>
           </a:p>
         </p:txBody>
@@ -5089,7 +5697,7 @@
                 </a:solidFill>
                 <a:latin typeface="Calibri"/>
               </a:rPr>
-              <a:t>aus 4.000 BUe-Anfrage-Mails  -38 %</a:t>
+              <a:t>echte BUe-Erstanlagen</a:t>
             </a:r>
           </a:p>
         </p:txBody>
@@ -5170,7 +5778,7 @@
                 </a:solidFill>
                 <a:latin typeface="Calibri"/>
               </a:rPr>
-              <a:t>MULTI-MAIL-CLUSTER</a:t>
+              <a:t>NACHREICHUNGEN / WOCHE</a:t>
             </a:r>
           </a:p>
         </p:txBody>
@@ -5205,7 +5813,7 @@
                 </a:solidFill>
                 <a:latin typeface="Calibri"/>
               </a:rPr>
-              <a:t>53 %</a:t>
+              <a:t>1.505</a:t>
             </a:r>
           </a:p>
         </p:txBody>
@@ -5240,7 +5848,7 @@
                 </a:solidFill>
                 <a:latin typeface="Calibri"/>
               </a:rPr>
-              <a:t>des Mailvolumens (2.138 Mails)</a:t>
+              <a:t>Folge-Mails zu offenen Vorgaengen</a:t>
             </a:r>
           </a:p>
         </p:txBody>
@@ -5321,7 +5929,7 @@
                 </a:solidFill>
                 <a:latin typeface="Calibri"/>
               </a:rPr>
-              <a:t>Ø MAILS / VORGANG</a:t>
+              <a:t>Ø MAILS / NEUEM VORGANG</a:t>
             </a:r>
           </a:p>
         </p:txBody>
@@ -5621,7 +6229,7 @@
                 </a:solidFill>
                 <a:latin typeface="Calibri"/>
               </a:rPr>
-              <a:t>TOP-10 MAKLERPOOLS (BUe-Anfrage-Mails pro Woche)</a:t>
+              <a:t>TOP-10 MAKLERPOOLS (Mails Status 'Neue BUe' pro Woche)</a:t>
             </a:r>
           </a:p>
         </p:txBody>
@@ -5720,7 +6328,7 @@
                 </a:solidFill>
                 <a:latin typeface="Calibri"/>
               </a:rPr>
-              <a:t>VORGAENGE: SINGLE vs. CLUSTER</a:t>
+              <a:t>WO DIE 1.505 NACHREICHUNGEN HERKOMMEN</a:t>
             </a:r>
           </a:p>
         </p:txBody>
@@ -5733,8 +6341,8 @@
         </p:nvSpPr>
         <p:spPr>
           <a:xfrm>
-            <a:off x="7680960" y="3337560"/>
-            <a:ext cx="4114800" cy="411480"/>
+            <a:off x="7680960" y="3291840"/>
+            <a:ext cx="4114800" cy="548640"/>
           </a:xfrm>
           <a:prstGeom prst="rect">
             <a:avLst/>
@@ -5777,8 +6385,8 @@
         </p:nvSpPr>
         <p:spPr>
           <a:xfrm>
-            <a:off x="7818120" y="3337560"/>
-            <a:ext cx="4114800" cy="411480"/>
+            <a:off x="7818120" y="3291840"/>
+            <a:ext cx="4114800" cy="548640"/>
           </a:xfrm>
           <a:prstGeom prst="rect">
             <a:avLst/>
@@ -5799,7 +6407,7 @@
                 </a:solidFill>
                 <a:latin typeface="Calibri"/>
               </a:rPr>
-              <a:t>1.862 Single-Mail-Vorgaenge  =  75 % der Vorgaenge / 47 % der Mails</a:t>
+              <a:t>1.862 Single-Mail-Vorgaenge  =  0 Nachreichungen</a:t>
             </a:r>
           </a:p>
         </p:txBody>
@@ -5812,8 +6420,8 @@
         </p:nvSpPr>
         <p:spPr>
           <a:xfrm>
-            <a:off x="7680960" y="3840480"/>
-            <a:ext cx="4114800" cy="411480"/>
+            <a:off x="7680960" y="3931920"/>
+            <a:ext cx="4114800" cy="548640"/>
           </a:xfrm>
           <a:prstGeom prst="rect">
             <a:avLst/>
@@ -5856,8 +6464,8 @@
         </p:nvSpPr>
         <p:spPr>
           <a:xfrm>
-            <a:off x="7818120" y="3840480"/>
-            <a:ext cx="4114800" cy="411480"/>
+            <a:off x="7818120" y="3931920"/>
+            <a:ext cx="4114800" cy="548640"/>
           </a:xfrm>
           <a:prstGeom prst="rect">
             <a:avLst/>
@@ -5878,7 +6486,7 @@
                 </a:solidFill>
                 <a:latin typeface="Calibri"/>
               </a:rPr>
-              <a:t>  633 Multi-Mail-Cluster  =  25 % der Vorgaenge / 53 % der Mails</a:t>
+              <a:t>633 Multi-Mail-Cluster  =  1.505 Nachreichungen</a:t>
             </a:r>
           </a:p>
         </p:txBody>
@@ -5891,7 +6499,7 @@
         </p:nvSpPr>
         <p:spPr>
           <a:xfrm>
-            <a:off x="7680960" y="4389120"/>
+            <a:off x="7680960" y="4617720"/>
             <a:ext cx="4114800" cy="457200"/>
           </a:xfrm>
           <a:prstGeom prst="rect">
@@ -5907,13 +6515,25 @@
           <a:p>
             <a:pPr algn="l"/>
             <a:r>
-              <a:rPr sz="1100" b="1">
+              <a:rPr sz="1100" b="0">
                 <a:solidFill>
                   <a:srgbClr val="1E293A"/>
                 </a:solidFill>
                 <a:latin typeface="Calibri"/>
               </a:rPr>
-              <a:t>-&gt; 633 Vorgaenge erzeugen mehr Mails als alle 1.862 Singles zusammen.</a:t>
+              <a:t>=&gt; 25 % der Vorgaenge erzeugen 100 % der Nachreichungen.</a:t>
+            </a:r>
+          </a:p>
+          <a:p>
+            <a:pPr algn="l"/>
+            <a:r>
+              <a:rPr sz="1100" b="0">
+                <a:solidFill>
+                  <a:srgbClr val="1E293A"/>
+                </a:solidFill>
+                <a:latin typeface="Calibri"/>
+              </a:rPr>
+              <a:t>    Bei diesen 633 Cluster-Vorgaengen kommen im Schnitt 3,4 Mails ein.</a:t>
             </a:r>
           </a:p>
         </p:txBody>
@@ -5926,8 +6546,8 @@
         </p:nvSpPr>
         <p:spPr>
           <a:xfrm>
-            <a:off x="7680960" y="4892040"/>
-            <a:ext cx="4114800" cy="320040"/>
+            <a:off x="7680960" y="5440680"/>
+            <a:ext cx="4114800" cy="274320"/>
           </a:xfrm>
           <a:prstGeom prst="rect">
             <a:avLst/>
@@ -5948,7 +6568,7 @@
                 </a:solidFill>
                 <a:latin typeface="Calibri"/>
               </a:rPr>
-              <a:t>Groesste Cluster (Mails zum selben Makler+Kunde):</a:t>
+              <a:t>GROESSTE CLUSTER (Mails zum selben Makler+Kunden):</a:t>
             </a:r>
           </a:p>
         </p:txBody>
@@ -5961,8 +6581,8 @@
         </p:nvSpPr>
         <p:spPr>
           <a:xfrm>
-            <a:off x="7772400" y="5212080"/>
-            <a:ext cx="1188720" cy="292608"/>
+            <a:off x="7772400" y="5760720"/>
+            <a:ext cx="1188720" cy="256032"/>
           </a:xfrm>
           <a:prstGeom prst="rect">
             <a:avLst/>
@@ -5977,7 +6597,7 @@
           <a:p>
             <a:pPr algn="l"/>
             <a:r>
-              <a:rPr sz="1100" b="1">
+              <a:rPr sz="1000" b="1">
                 <a:solidFill>
                   <a:srgbClr val="C8102E"/>
                 </a:solidFill>
@@ -5996,8 +6616,8 @@
         </p:nvSpPr>
         <p:spPr>
           <a:xfrm>
-            <a:off x="8961120" y="5212080"/>
-            <a:ext cx="2926080" cy="292608"/>
+            <a:off x="8915400" y="5760720"/>
+            <a:ext cx="3017520" cy="256032"/>
           </a:xfrm>
           <a:prstGeom prst="rect">
             <a:avLst/>
@@ -6012,13 +6632,13 @@
           <a:p>
             <a:pPr algn="l"/>
             <a:r>
-              <a:rPr sz="1100" b="0">
+              <a:rPr sz="1000" b="0">
                 <a:solidFill>
                   <a:srgbClr val="1E293A"/>
                 </a:solidFill>
                 <a:latin typeface="Calibri"/>
               </a:rPr>
-              <a:t>Cluster 005</a:t>
+              <a:t>Cluster 005 - 15 Nachreichungen zu 1 Neuanlage</a:t>
             </a:r>
           </a:p>
         </p:txBody>
@@ -6031,8 +6651,8 @@
         </p:nvSpPr>
         <p:spPr>
           <a:xfrm>
-            <a:off x="7772400" y="5504688"/>
-            <a:ext cx="1188720" cy="292608"/>
+            <a:off x="7772400" y="6016752"/>
+            <a:ext cx="1188720" cy="256032"/>
           </a:xfrm>
           <a:prstGeom prst="rect">
             <a:avLst/>
@@ -6047,7 +6667,7 @@
           <a:p>
             <a:pPr algn="l"/>
             <a:r>
-              <a:rPr sz="1100" b="1">
+              <a:rPr sz="1000" b="1">
                 <a:solidFill>
                   <a:srgbClr val="C8102E"/>
                 </a:solidFill>
@@ -6066,8 +6686,8 @@
         </p:nvSpPr>
         <p:spPr>
           <a:xfrm>
-            <a:off x="8961120" y="5504688"/>
-            <a:ext cx="2926080" cy="292608"/>
+            <a:off x="8915400" y="6016752"/>
+            <a:ext cx="3017520" cy="256032"/>
           </a:xfrm>
           <a:prstGeom prst="rect">
             <a:avLst/>
@@ -6082,13 +6702,13 @@
           <a:p>
             <a:pPr algn="l"/>
             <a:r>
-              <a:rPr sz="1100" b="0">
+              <a:rPr sz="1000" b="0">
                 <a:solidFill>
                   <a:srgbClr val="1E293A"/>
                 </a:solidFill>
                 <a:latin typeface="Calibri"/>
               </a:rPr>
-              <a:t>Cluster 509</a:t>
+              <a:t>Cluster 509 - 14 Nachreichungen zu 1 Neuanlage</a:t>
             </a:r>
           </a:p>
         </p:txBody>
@@ -6101,8 +6721,8 @@
         </p:nvSpPr>
         <p:spPr>
           <a:xfrm>
-            <a:off x="7772400" y="5797296"/>
-            <a:ext cx="1188720" cy="292608"/>
+            <a:off x="7772400" y="6272784"/>
+            <a:ext cx="1188720" cy="256032"/>
           </a:xfrm>
           <a:prstGeom prst="rect">
             <a:avLst/>
@@ -6117,7 +6737,7 @@
           <a:p>
             <a:pPr algn="l"/>
             <a:r>
-              <a:rPr sz="1100" b="1">
+              <a:rPr sz="1000" b="1">
                 <a:solidFill>
                   <a:srgbClr val="C8102E"/>
                 </a:solidFill>
@@ -6136,8 +6756,8 @@
         </p:nvSpPr>
         <p:spPr>
           <a:xfrm>
-            <a:off x="8961120" y="5797296"/>
-            <a:ext cx="2926080" cy="292608"/>
+            <a:off x="8915400" y="6272784"/>
+            <a:ext cx="3017520" cy="256032"/>
           </a:xfrm>
           <a:prstGeom prst="rect">
             <a:avLst/>
@@ -6152,13 +6772,13 @@
           <a:p>
             <a:pPr algn="l"/>
             <a:r>
-              <a:rPr sz="1100" b="0">
+              <a:rPr sz="1000" b="0">
                 <a:solidFill>
                   <a:srgbClr val="1E293A"/>
                 </a:solidFill>
                 <a:latin typeface="Calibri"/>
               </a:rPr>
-              <a:t>je Cluster 163, 211</a:t>
+              <a:t>Cluster 163 + 211 - je 13 Nachreichungen</a:t>
             </a:r>
           </a:p>
         </p:txBody>
@@ -6171,8 +6791,8 @@
         </p:nvSpPr>
         <p:spPr>
           <a:xfrm>
-            <a:off x="7772400" y="6089904"/>
-            <a:ext cx="1188720" cy="292608"/>
+            <a:off x="7772400" y="6528816"/>
+            <a:ext cx="1188720" cy="256032"/>
           </a:xfrm>
           <a:prstGeom prst="rect">
             <a:avLst/>
@@ -6187,7 +6807,7 @@
           <a:p>
             <a:pPr algn="l"/>
             <a:r>
-              <a:rPr sz="1100" b="1">
+              <a:rPr sz="1000" b="1">
                 <a:solidFill>
                   <a:srgbClr val="C8102E"/>
                 </a:solidFill>
@@ -6206,8 +6826,8 @@
         </p:nvSpPr>
         <p:spPr>
           <a:xfrm>
-            <a:off x="8961120" y="6089904"/>
-            <a:ext cx="2926080" cy="292608"/>
+            <a:off x="8915400" y="6528816"/>
+            <a:ext cx="3017520" cy="256032"/>
           </a:xfrm>
           <a:prstGeom prst="rect">
             <a:avLst/>
@@ -6222,13 +6842,13 @@
           <a:p>
             <a:pPr algn="l"/>
             <a:r>
-              <a:rPr sz="1100" b="0">
+              <a:rPr sz="1000" b="0">
                 <a:solidFill>
                   <a:srgbClr val="1E293A"/>
                 </a:solidFill>
                 <a:latin typeface="Calibri"/>
               </a:rPr>
-              <a:t>je Cluster 484, 585</a:t>
+              <a:t>Cluster 484 + 585 - je 12 Nachreichungen</a:t>
             </a:r>
           </a:p>
         </p:txBody>
@@ -6309,7 +6929,7 @@
                 </a:solidFill>
                 <a:latin typeface="Calibri"/>
               </a:rPr>
-              <a:t>TAKE-AWAY:  Anbindungs-/Automatisierungs-Strecke lohnt sich zuerst fuer die Top-3 (60 % der Mails) | Multi-Mail-Cluster bilden 53 % des Volumens -&gt; Konsolidierungs-Hebel</a:t>
+              <a:t>TAKE-AWAY:  Anbindungs-/Automatisierungs-Strecke fuer JDC + Fonds Finanz + blau direkt = 60 % Hebel auf einen Schlag  |  Mail-Zuordnung zu offenem Vorgang spart 1.505 Nachreichungs-Eroeffnungen</a:t>
             </a:r>
           </a:p>
         </p:txBody>
